--- a/docs/pptx/auc3/jx-auc3-linsubhr-egfrdisc-grade3.pptx
+++ b/docs/pptx/auc3/jx-auc3-linsubhr-egfrdisc-grade3.pptx
@@ -5331,7 +5331,7 @@
           <p:spPr>
             <a:xfrm>
               <a:off x="817517" y="1896563"/>
-              <a:ext cx="4869911" cy="82021"/>
+              <a:ext cx="5721309" cy="82021"/>
             </a:xfrm>
             <a:prstGeom prst="rect">
               <a:avLst/>
@@ -5363,7 +5363,7 @@
                   <a:latin typeface="Helvetica"/>
                   <a:cs typeface="Helvetica"/>
                 </a:rPr>
-                <a:t>subHR per 1 mL/min: 0.98 (0.97-0.99)  |  per IQR (Δ = 22.8): 0.66 (0.50-0.87)  |  IQR: [-13.3, 9.5]</a:t>
+                <a:t>subHR per 10 mL/min decline: 1.20 (1.06-1.35)  |  per IQR decline (Δ = 22.8): 1.52 (1.15-2.00)  |  IQR: [-13.3, 9.5]</a:t>
               </a:r>
             </a:p>
           </p:txBody>

--- a/docs/pptx/auc3/jx-auc3-linsubhr-egfrdisc-grade3.pptx
+++ b/docs/pptx/auc3/jx-auc3-linsubhr-egfrdisc-grade3.pptx
@@ -5331,7 +5331,7 @@
           <p:spPr>
             <a:xfrm>
               <a:off x="817517" y="1896563"/>
-              <a:ext cx="5721309" cy="82021"/>
+              <a:ext cx="6264462" cy="82021"/>
             </a:xfrm>
             <a:prstGeom prst="rect">
               <a:avLst/>
@@ -5363,7 +5363,7 @@
                   <a:latin typeface="Helvetica"/>
                   <a:cs typeface="Helvetica"/>
                 </a:rPr>
-                <a:t>subHR per 10 mL/min decline: 1.20 (1.06-1.35)  |  per IQR decline (Δ = 22.8): 1.52 (1.15-2.00)  |  IQR: [-13.3, 9.5]</a:t>
+                <a:t>subHR per 10 mL/min decline: 1.20 (1.06-1.35), p = 0.003  |  per IQR decline (Δ = 22.8): 1.52 (1.15-2.00)  |  IQR: [-13.3, 9.5]</a:t>
               </a:r>
             </a:p>
           </p:txBody>

--- a/docs/pptx/auc3/jx-auc3-linsubhr-egfrdisc-grade3.pptx
+++ b/docs/pptx/auc3/jx-auc3-linsubhr-egfrdisc-grade3.pptx
@@ -5331,7 +5331,7 @@
           <p:spPr>
             <a:xfrm>
               <a:off x="817517" y="1896563"/>
-              <a:ext cx="6264462" cy="82021"/>
+              <a:ext cx="6928225" cy="82021"/>
             </a:xfrm>
             <a:prstGeom prst="rect">
               <a:avLst/>
@@ -5363,7 +5363,7 @@
                   <a:latin typeface="Helvetica"/>
                   <a:cs typeface="Helvetica"/>
                 </a:rPr>
-                <a:t>subHR per 10 mL/min decline: 1.20 (1.06-1.35), p = 0.003  |  per IQR decline (Δ = 22.8): 1.52 (1.15-2.00)  |  IQR: [-13.3, 9.5]</a:t>
+                <a:t>subHR per 10 mL/min decline: 1.20 (1.06-1.35), p_Bonf = 0.017 (n = 6)  |  per IQR decline (Δ = 22.8): 1.52 (1.15-2.00)  |  IQR: [-13.3, 9.5]</a:t>
               </a:r>
             </a:p>
           </p:txBody>
